--- a/ws02/class/ws02_슬롯5_실습_promptfoo.pptx
+++ b/ws02/class/ws02_슬롯5_실습_promptfoo.pptx
@@ -5871,7 +5871,7 @@
                   <a:srgbClr val="8899AA"/>
                 </a:solidFill>
               </a:rPr>
-              <a:t>proxy 연결 확인 + Gandalf CTF 체험</a:t>
+              <a:t>Gandalf 챌린지 체험</a:t>
             </a:r>
             <a:endParaRPr lang="en-US" sz="1100" dirty="0"/>
           </a:p>
@@ -7975,7 +7975,7 @@
                 <a:ea typeface="Courier New" pitchFamily="34" charset="-122"/>
                 <a:cs typeface="Courier New" pitchFamily="34" charset="-120"/>
               </a:rPr>
-              <a:t># 셀 3: proxy 환경변수 설정</a:t>
+              <a:t># 셀 3: DeepSeek API 설정</a:t>
             </a:r>
             <a:endParaRPr lang="en-US" sz="1050" dirty="0"/>
           </a:p>
@@ -8009,7 +8009,7 @@
                 <a:ea typeface="Courier New" pitchFamily="34" charset="-122"/>
                 <a:cs typeface="Courier New" pitchFamily="34" charset="-120"/>
               </a:rPr>
-              <a:t>os.environ["OPENAI_BASE_URL"] = LITELLM_BASE_URL</a:t>
+              <a:t>os.environ["OPENAI_BASE_URL"] = DEEPSEEK_BASE_URL</a:t>
             </a:r>
             <a:endParaRPr lang="en-US" sz="1050" dirty="0"/>
           </a:p>
@@ -8026,7 +8026,7 @@
                 <a:ea typeface="Courier New" pitchFamily="34" charset="-122"/>
                 <a:cs typeface="Courier New" pitchFamily="34" charset="-120"/>
               </a:rPr>
-              <a:t>os.environ["OPENAI_API_KEY"]  = LITELLM_API_KEY</a:t>
+              <a:t>os.environ["OPENAI_API_KEY"]  = DEEPSEEK_API_KEY</a:t>
             </a:r>
             <a:endParaRPr lang="en-US" sz="1050" dirty="0"/>
           </a:p>
